--- a/angular/Angular.pptx
+++ b/angular/Angular.pptx
@@ -303,7 +303,7 @@
           <a:p>
             <a:fld id="{3A4DE842-E3B8-4097-9F8A-C9DBE7787487}" type="datetimeFigureOut">
               <a:rPr lang="ar-EG" smtClean="0"/>
-              <a:t>02/06/1447</a:t>
+              <a:t>05/04/1448</a:t>
             </a:fld>
             <a:endParaRPr lang="ar-EG"/>
           </a:p>
@@ -578,7 +578,7 @@
           <a:p>
             <a:fld id="{3A4DE842-E3B8-4097-9F8A-C9DBE7787487}" type="datetimeFigureOut">
               <a:rPr lang="ar-EG" smtClean="0"/>
-              <a:t>02/06/1447</a:t>
+              <a:t>05/04/1448</a:t>
             </a:fld>
             <a:endParaRPr lang="ar-EG"/>
           </a:p>
@@ -772,7 +772,7 @@
           <a:p>
             <a:fld id="{3A4DE842-E3B8-4097-9F8A-C9DBE7787487}" type="datetimeFigureOut">
               <a:rPr lang="ar-EG" smtClean="0"/>
-              <a:t>02/06/1447</a:t>
+              <a:t>05/04/1448</a:t>
             </a:fld>
             <a:endParaRPr lang="ar-EG"/>
           </a:p>
@@ -1045,7 +1045,7 @@
           <a:p>
             <a:fld id="{3A4DE842-E3B8-4097-9F8A-C9DBE7787487}" type="datetimeFigureOut">
               <a:rPr lang="ar-EG" smtClean="0"/>
-              <a:t>02/06/1447</a:t>
+              <a:t>05/04/1448</a:t>
             </a:fld>
             <a:endParaRPr lang="ar-EG"/>
           </a:p>
@@ -1386,7 +1386,7 @@
           <a:p>
             <a:fld id="{3A4DE842-E3B8-4097-9F8A-C9DBE7787487}" type="datetimeFigureOut">
               <a:rPr lang="ar-EG" smtClean="0"/>
-              <a:t>02/06/1447</a:t>
+              <a:t>05/04/1448</a:t>
             </a:fld>
             <a:endParaRPr lang="ar-EG"/>
           </a:p>
@@ -2009,7 +2009,7 @@
           <a:p>
             <a:fld id="{3A4DE842-E3B8-4097-9F8A-C9DBE7787487}" type="datetimeFigureOut">
               <a:rPr lang="ar-EG" smtClean="0"/>
-              <a:t>02/06/1447</a:t>
+              <a:t>05/04/1448</a:t>
             </a:fld>
             <a:endParaRPr lang="ar-EG"/>
           </a:p>
@@ -2869,7 +2869,7 @@
           <a:p>
             <a:fld id="{3A4DE842-E3B8-4097-9F8A-C9DBE7787487}" type="datetimeFigureOut">
               <a:rPr lang="ar-EG" smtClean="0"/>
-              <a:t>02/06/1447</a:t>
+              <a:t>05/04/1448</a:t>
             </a:fld>
             <a:endParaRPr lang="ar-EG"/>
           </a:p>
@@ -3039,7 +3039,7 @@
           <a:p>
             <a:fld id="{3A4DE842-E3B8-4097-9F8A-C9DBE7787487}" type="datetimeFigureOut">
               <a:rPr lang="ar-EG" smtClean="0"/>
-              <a:t>02/06/1447</a:t>
+              <a:t>05/04/1448</a:t>
             </a:fld>
             <a:endParaRPr lang="ar-EG"/>
           </a:p>
@@ -3219,7 +3219,7 @@
           <a:p>
             <a:fld id="{3A4DE842-E3B8-4097-9F8A-C9DBE7787487}" type="datetimeFigureOut">
               <a:rPr lang="ar-EG" smtClean="0"/>
-              <a:t>02/06/1447</a:t>
+              <a:t>05/04/1448</a:t>
             </a:fld>
             <a:endParaRPr lang="ar-EG"/>
           </a:p>
@@ -3389,7 +3389,7 @@
           <a:p>
             <a:fld id="{3A4DE842-E3B8-4097-9F8A-C9DBE7787487}" type="datetimeFigureOut">
               <a:rPr lang="ar-EG" smtClean="0"/>
-              <a:t>02/06/1447</a:t>
+              <a:t>05/04/1448</a:t>
             </a:fld>
             <a:endParaRPr lang="ar-EG"/>
           </a:p>
@@ -3636,7 +3636,7 @@
           <a:p>
             <a:fld id="{3A4DE842-E3B8-4097-9F8A-C9DBE7787487}" type="datetimeFigureOut">
               <a:rPr lang="ar-EG" smtClean="0"/>
-              <a:t>02/06/1447</a:t>
+              <a:t>05/04/1448</a:t>
             </a:fld>
             <a:endParaRPr lang="ar-EG"/>
           </a:p>
@@ -3928,7 +3928,7 @@
           <a:p>
             <a:fld id="{3A4DE842-E3B8-4097-9F8A-C9DBE7787487}" type="datetimeFigureOut">
               <a:rPr lang="ar-EG" smtClean="0"/>
-              <a:t>02/06/1447</a:t>
+              <a:t>05/04/1448</a:t>
             </a:fld>
             <a:endParaRPr lang="ar-EG"/>
           </a:p>
@@ -4372,7 +4372,7 @@
           <a:p>
             <a:fld id="{3A4DE842-E3B8-4097-9F8A-C9DBE7787487}" type="datetimeFigureOut">
               <a:rPr lang="ar-EG" smtClean="0"/>
-              <a:t>02/06/1447</a:t>
+              <a:t>05/04/1448</a:t>
             </a:fld>
             <a:endParaRPr lang="ar-EG"/>
           </a:p>
@@ -4490,7 +4490,7 @@
           <a:p>
             <a:fld id="{3A4DE842-E3B8-4097-9F8A-C9DBE7787487}" type="datetimeFigureOut">
               <a:rPr lang="ar-EG" smtClean="0"/>
-              <a:t>02/06/1447</a:t>
+              <a:t>05/04/1448</a:t>
             </a:fld>
             <a:endParaRPr lang="ar-EG"/>
           </a:p>
@@ -4585,7 +4585,7 @@
           <a:p>
             <a:fld id="{3A4DE842-E3B8-4097-9F8A-C9DBE7787487}" type="datetimeFigureOut">
               <a:rPr lang="ar-EG" smtClean="0"/>
-              <a:t>02/06/1447</a:t>
+              <a:t>05/04/1448</a:t>
             </a:fld>
             <a:endParaRPr lang="ar-EG"/>
           </a:p>
@@ -4864,7 +4864,7 @@
           <a:p>
             <a:fld id="{3A4DE842-E3B8-4097-9F8A-C9DBE7787487}" type="datetimeFigureOut">
               <a:rPr lang="ar-EG" smtClean="0"/>
-              <a:t>02/06/1447</a:t>
+              <a:t>05/04/1448</a:t>
             </a:fld>
             <a:endParaRPr lang="ar-EG"/>
           </a:p>
@@ -5139,7 +5139,7 @@
           <a:p>
             <a:fld id="{3A4DE842-E3B8-4097-9F8A-C9DBE7787487}" type="datetimeFigureOut">
               <a:rPr lang="ar-EG" smtClean="0"/>
-              <a:t>02/06/1447</a:t>
+              <a:t>05/04/1448</a:t>
             </a:fld>
             <a:endParaRPr lang="ar-EG"/>
           </a:p>
@@ -5582,7 +5582,7 @@
           <a:p>
             <a:fld id="{3A4DE842-E3B8-4097-9F8A-C9DBE7787487}" type="datetimeFigureOut">
               <a:rPr lang="ar-EG" smtClean="0"/>
-              <a:t>02/06/1447</a:t>
+              <a:t>05/04/1448</a:t>
             </a:fld>
             <a:endParaRPr lang="ar-EG"/>
           </a:p>
@@ -7471,8 +7471,8 @@
         </p:blipFill>
         <p:spPr>
           <a:xfrm>
-            <a:off x="1617768" y="1583606"/>
-            <a:ext cx="8067006" cy="3690787"/>
+            <a:off x="637294" y="1353312"/>
+            <a:ext cx="9672459" cy="4425308"/>
           </a:xfrm>
           <a:prstGeom prst="rect">
             <a:avLst/>
